--- a/team-activity-log/frontend/e2e/fixtures/Formatting_2024.pptx
+++ b/team-activity-log/frontend/e2e/fixtures/Formatting_2024.pptx
@@ -5,6 +5,7 @@
     <p:sldId id="256" r:id="rIdS1"/>
     <p:sldId id="257" r:id="rIdS2"/>
     <p:sldId id="258" r:id="rIdS3"/>
+    <p:sldId id="259" r:id="rIdS4"/>
   </p:sldIdLst>
   <p:sldSz cx="12192000" cy="6858000"/>
 </p:presentation>
@@ -150,8 +151,142 @@
 </dgm:dataModel>
 </file>
 
+<file path=ppt/diagrams/data2.xml><?xml version="1.0" encoding="utf-8"?>
+<dgm:dataModel xmlns:dgm="http://schemas.openxmlformats.org/drawingml/2006/diagram" xmlns:a="http://schemas.openxmlformats.org/drawingml/2006/main" xmlns:r="http://schemas.openxmlformats.org/officeDocument/2006/relationships" xmlns:p="http://schemas.openxmlformats.org/presentationml/2006/main">
+  <dgm:ptLst>
+    <dgm:pt modelId="0" type="doc"/>
+    <dgm:pt modelId="1">
+      <dgm:t>
+        <a:bodyPr/>
+        <a:p>
+          <a:r>
+            <a:t>Step A</a:t>
+          </a:r>
+        </a:p>
+      </dgm:t>
+    </dgm:pt>
+    <dgm:pt modelId="2">
+      <dgm:t>
+        <a:bodyPr/>
+        <a:p>
+          <a:r>
+            <a:t>Step B</a:t>
+          </a:r>
+        </a:p>
+      </dgm:t>
+    </dgm:pt>
+  </dgm:ptLst>
+  <dgm:extLst>
+    <a:ext uri="http://schemas.microsoft.com/office/drawing/2008/diagram">
+      <dsp:dataModelExt xmlns:dsp="http://schemas.microsoft.com/office/drawing/2008/diagram" relId="rIdDraw" minVer="http://schemas.openxmlformats.org/drawingml/2006/diagram"/>
+    </a:ext>
+  </dgm:extLst>
+</dgm:dataModel>
+</file>
+
+<file path=ppt/diagrams/drawing1.xml><?xml version="1.0" encoding="utf-8"?>
+<dsp:drawing xmlns:dsp="http://schemas.microsoft.com/office/drawing/2008/diagram" xmlns:a="http://schemas.openxmlformats.org/drawingml/2006/main" xmlns:r="http://schemas.openxmlformats.org/officeDocument/2006/relationships" xmlns:p="http://schemas.openxmlformats.org/presentationml/2006/main">
+  <dsp:spTree>
+    <dsp:nvGrpSpPr>
+      <dsp:cNvPr id="0" name=""/>
+      <dsp:cNvGrpSpPr/>
+    </dsp:nvGrpSpPr>
+    <dsp:grpSpPr/>
+    <dsp:sp modelId="{0}">
+      <dsp:nvSpPr>
+        <dsp:cNvPr id="0" name=""/>
+        <dsp:cNvSpPr/>
+      </dsp:nvSpPr>
+      <dsp:spPr>
+        <a:xfrm>
+          <a:off x="0" y="0"/>
+          <a:ext cx="2286000" cy="914400"/>
+        </a:xfrm>
+        <a:prstGeom prst="roundRect">
+          <a:avLst/>
+        </a:prstGeom>
+        <a:solidFill>
+          <a:schemeClr val="accent1"/>
+        </a:solidFill>
+      </dsp:spPr>
+      <dsp:txBody>
+        <a:bodyPr anchor="ctr"/>
+        <a:p>
+          <a:r>
+            <a:rPr lang="en-US" sz="2000">
+              <a:solidFill>
+                <a:srgbClr val="FFFFFF"/>
+              </a:solidFill>
+            </a:rPr>
+            <a:t>Step A</a:t>
+          </a:r>
+        </a:p>
+      </dsp:txBody>
+    </dsp:sp>
+    <dsp:sp modelId="{1}">
+      <dsp:nvSpPr>
+        <dsp:cNvPr id="0" name=""/>
+        <dsp:cNvSpPr/>
+      </dsp:nvSpPr>
+      <dsp:spPr>
+        <a:xfrm>
+          <a:off x="2743200" y="0"/>
+          <a:ext cx="2286000" cy="914400"/>
+        </a:xfrm>
+        <a:prstGeom prst="roundRect">
+          <a:avLst/>
+        </a:prstGeom>
+        <a:solidFill>
+          <a:schemeClr val="accent1"/>
+        </a:solidFill>
+      </dsp:spPr>
+      <dsp:txBody>
+        <a:bodyPr anchor="ctr"/>
+        <a:p>
+          <a:r>
+            <a:rPr lang="en-US" sz="2000">
+              <a:solidFill>
+                <a:srgbClr val="FFFFFF"/>
+              </a:solidFill>
+            </a:rPr>
+            <a:t>Step B</a:t>
+          </a:r>
+        </a:p>
+      </dsp:txBody>
+    </dsp:sp>
+  </dsp:spTree>
+</dsp:drawing>
+</file>
+
+<file path=ppt/notesSlides/notesSlide4.xml><?xml version="1.0" encoding="utf-8"?>
+<p:notes xmlns:a="http://schemas.openxmlformats.org/drawingml/2006/main" xmlns:r="http://schemas.openxmlformats.org/officeDocument/2006/relationships" xmlns:p="http://schemas.openxmlformats.org/presentationml/2006/main">
+  <p:cSld>
+    <p:spTree>
+      <p:sp>
+        <p:nvSpPr>
+          <p:cNvPr id="2" name="Notes"/>
+          <p:cNvSpPr/>
+          <p:nvPr>
+            <p:ph type="body" idx="1"/>
+          </p:nvPr>
+        </p:nvSpPr>
+        <p:txBody>
+          <a:bodyPr/>
+          <a:p>
+            <a:r>
+              <a:rPr lang="en-US"/>
+              <a:t>Designed slide notes</a:t>
+            </a:r>
+          </a:p>
+        </p:txBody>
+      </p:sp>
+    </p:spTree>
+  </p:cSld>
+</p:notes>
+</file>
+
 <file path=ppt/slideLayouts/slideLayout1.xml><?xml version="1.0" encoding="utf-8"?>
-<p:sldLayout xmlns:a="http://schemas.openxmlformats.org/drawingml/2006/main" xmlns:r="http://schemas.openxmlformats.org/officeDocument/2006/relationships" xmlns:p="http://schemas.openxmlformats.org/presentationml/2006/main" type="title">
+<p:sldLayout xmlns:a="http://schemas.openxmlformats.org/drawingml/2006/main" xmlns:r="http://schemas.openxmlformats.org/officeDocument/2006/relationships" xmlns:p="http://schemas.openxmlformats.org/presentationml/2006/main" type="title" showMasterSp="0">
   <p:cSld>
     <p:spTree/>
   </p:cSld>
@@ -194,8 +329,98 @@
 <file path=ppt/slideMasters/slideMaster1.xml><?xml version="1.0" encoding="utf-8"?>
 <p:sldMaster xmlns:a="http://schemas.openxmlformats.org/drawingml/2006/main" xmlns:r="http://schemas.openxmlformats.org/officeDocument/2006/relationships" xmlns:p="http://schemas.openxmlformats.org/presentationml/2006/main">
   <p:cSld>
-    <p:spTree/>
+    <p:bg>
+      <p:bgPr>
+        <a:solidFill>
+          <a:srgbClr val="F7F9FC"/>
+        </a:solidFill>
+        <a:effectLst/>
+      </p:bgPr>
+    </p:bg>
+    <p:spTree>
+      <p:sp>
+        <p:nvSpPr>
+          <p:cNvPr id="2" name="S2"/>
+          <p:cNvSpPr/>
+          <p:nvPr>
+            <p:ph type="title"/>
+          </p:nvPr>
+        </p:nvSpPr>
+        <p:spPr>
+          <a:xfrm>
+            <a:off x="457200" y="274320"/>
+            <a:ext cx="11247120" cy="914400"/>
+          </a:xfrm>
+        </p:spPr>
+        <p:txBody>
+          <a:bodyPr anchor="b"/>
+          <a:p>
+            <a:r>
+              <a:rPr lang="en-US"/>
+              <a:t/>
+            </a:r>
+          </a:p>
+        </p:txBody>
+      </p:sp>
+      <p:pic>
+        <p:nvPicPr>
+          <p:cNvPr id="3" name="Logo"/>
+          <p:cNvPicPr/>
+          <p:nvPr/>
+        </p:nvPicPr>
+        <p:blipFill>
+          <a:blip r:embed="rIdLogo"/>
+        </p:blipFill>
+        <p:spPr>
+          <a:xfrm>
+            <a:off x="11155680" y="6217920"/>
+            <a:ext cx="822960" cy="457200"/>
+          </a:xfrm>
+        </p:spPr>
+      </p:pic>
+      <p:sp>
+        <p:nvSpPr>
+          <p:cNvPr id="4" name="Bar"/>
+          <p:cNvSpPr/>
+          <p:nvPr/>
+        </p:nvSpPr>
+        <p:spPr>
+          <a:xfrm>
+            <a:off x="0" y="6675120"/>
+            <a:ext cx="12191695" cy="182880"/>
+          </a:xfrm>
+          <a:prstGeom prst="rect">
+            <a:avLst/>
+          </a:prstGeom>
+          <a:solidFill>
+            <a:schemeClr val="accent1"/>
+          </a:solidFill>
+        </p:spPr>
+      </p:sp>
+    </p:spTree>
   </p:cSld>
+  <p:clrMap bg1="lt1" tx1="dk1" bg2="lt2" tx2="dk2" accent1="accent1" accent2="accent2" accent3="accent3" accent4="accent4" accent5="accent5" accent6="accent6" hlink="hlink" folHlink="folHlink"/>
+  <p:txStyles>
+    <p:titleStyle>
+      <a:lvl1pPr>
+        <a:defRPr sz="3600">
+          <a:solidFill>
+            <a:schemeClr val="tx2"/>
+          </a:solidFill>
+        </a:defRPr>
+      </a:lvl1pPr>
+    </p:titleStyle>
+    <p:bodyStyle>
+      <a:lvl1pPr>
+        <a:defRPr sz="2000"/>
+      </a:lvl1pPr>
+    </p:bodyStyle>
+    <p:otherStyle>
+      <a:lvl1pPr>
+        <a:defRPr sz="1800"/>
+      </a:lvl1pPr>
+    </p:otherStyle>
+  </p:txStyles>
 </p:sldMaster>
 </file>
 
@@ -601,6 +826,150 @@
 </p:sld>
 </file>
 
+<file path=ppt/slides/slide4.xml><?xml version="1.0" encoding="utf-8"?>
+<p:sld xmlns:a="http://schemas.openxmlformats.org/drawingml/2006/main" xmlns:r="http://schemas.openxmlformats.org/officeDocument/2006/relationships" xmlns:p="http://schemas.openxmlformats.org/presentationml/2006/main">
+  <p:cSld>
+    <p:spTree>
+      <p:nvGrpSpPr>
+        <p:cNvPr id="1" name=""/>
+        <p:cNvGrpSpPr/>
+        <p:nvPr/>
+      </p:nvGrpSpPr>
+      <p:grpSpPr/>
+      <p:sp>
+        <p:nvSpPr>
+          <p:cNvPr id="2" name="S2"/>
+          <p:cNvSpPr/>
+          <p:nvPr>
+            <p:ph type="title"/>
+          </p:nvPr>
+        </p:nvSpPr>
+        <p:txBody>
+          <a:bodyPr/>
+          <a:p>
+            <a:r>
+              <a:rPr lang="en-US"/>
+              <a:t>Design</a:t>
+            </a:r>
+          </a:p>
+        </p:txBody>
+      </p:sp>
+      <p:grpSp>
+        <p:nvGrpSpPr>
+          <p:cNvPr id="3" name="Group"/>
+          <p:cNvGrpSpPr/>
+          <p:nvPr/>
+        </p:nvGrpSpPr>
+        <p:grpSpPr>
+          <a:xfrm>
+            <a:off x="914400" y="1828800"/>
+            <a:ext cx="3657600" cy="1828800"/>
+            <a:chOff x="0" y="0"/>
+            <a:chExt cx="1828800" cy="914400"/>
+          </a:xfrm>
+        </p:grpSpPr>
+        <p:sp>
+          <p:nvSpPr>
+            <p:cNvPr id="4" name="Box"/>
+            <p:cNvSpPr/>
+            <p:nvPr/>
+          </p:nvSpPr>
+          <p:spPr>
+            <a:xfrm>
+              <a:off x="0" y="0"/>
+              <a:ext cx="914400" cy="457200"/>
+            </a:xfrm>
+            <a:prstGeom prst="roundRect">
+              <a:avLst/>
+            </a:prstGeom>
+            <a:solidFill>
+              <a:schemeClr val="accent2"/>
+            </a:solidFill>
+          </p:spPr>
+          <p:txBody>
+            <a:bodyPr anchor="ctr"/>
+            <a:p>
+              <a:r>
+                <a:rPr lang="en-US"/>
+                <a:t>Grouped box</a:t>
+              </a:r>
+            </a:p>
+          </p:txBody>
+        </p:sp>
+      </p:grpSp>
+      <p:cxnSp>
+        <p:nvCxnSpPr>
+          <p:cNvPr id="5" name="Arrow"/>
+          <p:cNvCxnSpPr/>
+          <p:nvPr/>
+        </p:nvCxnSpPr>
+        <p:spPr>
+          <a:xfrm flipV="1">
+            <a:off x="5029200" y="2743200"/>
+            <a:ext cx="1828800" cy="0"/>
+          </a:xfrm>
+          <a:prstGeom prst="straightConnector1">
+            <a:avLst/>
+          </a:prstGeom>
+          <a:ln w="25400">
+            <a:solidFill>
+              <a:srgbClr val="333333"/>
+            </a:solidFill>
+            <a:tailEnd type="triangle"/>
+          </a:ln>
+        </p:spPr>
+      </p:cxnSp>
+      <p:sp>
+        <p:nvSpPr>
+          <p:cNvPr id="6" name="S6"/>
+          <p:cNvSpPr txBox="1"/>
+          <p:nvPr/>
+        </p:nvSpPr>
+        <p:spPr>
+          <a:xfrm>
+            <a:off x="7315200" y="1828800"/>
+            <a:ext cx="3657600" cy="914400"/>
+          </a:xfrm>
+        </p:spPr>
+        <p:txBody>
+          <a:bodyPr/>
+          <a:p>
+            <a:r>
+              <a:rPr lang="en-US" sz="2400"/>
+              <a:t>Big</a:t>
+            </a:r>
+            <a:r>
+              <a:rPr lang="en-US" sz="1200"/>
+              <a:t> small</a:t>
+            </a:r>
+            <a:r>
+              <a:rPr lang="en-US" sz="2400"/>
+              <a:t> again</a:t>
+            </a:r>
+          </a:p>
+        </p:txBody>
+      </p:sp>
+      <p:graphicFrame>
+        <p:nvGraphicFramePr>
+          <p:cNvPr id="7" name="SmartArt"/>
+          <p:cNvGraphicFramePr/>
+          <p:nvPr/>
+        </p:nvGraphicFramePr>
+        <p:xfrm>
+          <a:off x="914400" y="4572000"/>
+          <a:ext cx="5486400" cy="914400"/>
+        </p:xfrm>
+        <a:graphic>
+          <a:graphicData uri="http://schemas.openxmlformats.org/drawingml/2006/diagram">
+            <dgm:relIds xmlns:dgm="http://schemas.openxmlformats.org/drawingml/2006/diagram" r:dm="rIdDm" r:lo="x" r:qs="x" r:cs="x"/>
+          </a:graphicData>
+        </a:graphic>
+      </p:graphicFrame>
+    </p:spTree>
+  </p:cSld>
+</p:sld>
+</file>
+
 <file path=ppt/theme/theme1.xml><?xml version="1.0" encoding="utf-8"?>
 <a:theme xmlns:a="http://schemas.openxmlformats.org/drawingml/2006/main" xmlns:r="http://schemas.openxmlformats.org/officeDocument/2006/relationships" xmlns:p="http://schemas.openxmlformats.org/presentationml/2006/main" name="Test">
   <a:themeElements>
@@ -624,6 +993,14 @@
         <a:srgbClr val="ED7D31"/>
       </a:accent2>
     </a:clrScheme>
+    <a:fontScheme name="Test">
+      <a:majorFont>
+        <a:latin typeface="Georgia"/>
+      </a:majorFont>
+      <a:minorFont>
+        <a:latin typeface="Verdana"/>
+      </a:minorFont>
+    </a:fontScheme>
   </a:themeElements>
 </a:theme>
 </file>
--- a/team-activity-log/frontend/e2e/fixtures/Formatting_2024.pptx
+++ b/team-activity-log/frontend/e2e/fixtures/Formatting_2024.pptx
@@ -8,6 +8,11 @@
     <p:sldId id="259" r:id="rIdS4"/>
   </p:sldIdLst>
   <p:sldSz cx="12192000" cy="6858000"/>
+  <p:defaultTextStyle>
+    <a:lvl1pPr>
+      <a:defRPr sz="1600"/>
+    </a:lvl1pPr>
+  </p:defaultTextStyle>
 </p:presentation>
 </file>
 
@@ -37,6 +42,11 @@
               </c:strCache>
             </c:strRef>
           </c:tx>
+          <c:spPr>
+            <a:solidFill>
+              <a:srgbClr val="2E75B6"/>
+            </a:solidFill>
+          </c:spPr>
           <c:cat>
             <c:strRef>
               <c:strCache>
@@ -949,6 +959,183 @@
           </a:p>
         </p:txBody>
       </p:sp>
+      <p:sp>
+        <p:nvSpPr>
+          <p:cNvPr id="8" name="S8"/>
+          <p:cNvSpPr txBox="1"/>
+          <p:nvPr/>
+        </p:nvSpPr>
+        <p:spPr>
+          <a:xfrm>
+            <a:off x="7315200" y="2926080"/>
+            <a:ext cx="3657600" cy="548640"/>
+          </a:xfrm>
+        </p:spPr>
+        <p:txBody>
+          <a:bodyPr/>
+          <a:p>
+            <a:r>
+              <a:rPr lang="en-US"/>
+              <a:t>Plain then </a:t>
+            </a:r>
+            <a:r>
+              <a:rPr lang="en-US">
+                <a:latin typeface="Courier New"/>
+              </a:rPr>
+              <a:t>code</a:t>
+            </a:r>
+          </a:p>
+        </p:txBody>
+      </p:sp>
+      <p:sp>
+        <p:nvSpPr>
+          <p:cNvPr id="9" name="Glass"/>
+          <p:cNvSpPr/>
+          <p:nvPr/>
+        </p:nvSpPr>
+        <p:spPr>
+          <a:xfrm>
+            <a:off x="8229600" y="3840480"/>
+            <a:ext cx="1828800" cy="1097280"/>
+          </a:xfrm>
+          <a:prstGeom prst="ellipse">
+            <a:avLst/>
+          </a:prstGeom>
+          <a:solidFill>
+            <a:srgbClr val="4472C4">
+              <a:alpha val="40000"/>
+            </a:srgbClr>
+          </a:solidFill>
+        </p:spPr>
+      </p:sp>
+      <p:graphicFrame>
+        <p:nvGraphicFramePr>
+          <p:cNvPr id="10" name="Styled table"/>
+          <p:cNvGraphicFramePr/>
+          <p:nvPr/>
+        </p:nvGraphicFramePr>
+        <p:xfrm>
+          <a:off x="7315200" y="5120640"/>
+          <a:ext cx="914400" cy="914400"/>
+        </p:xfrm>
+        <a:graphic>
+          <a:graphicData uri="http://schemas.openxmlformats.org/drawingml/2006/table">
+            <a:tbl>
+              <a:tblPr firstRow="1" bandRow="1">
+                <a:tableStyleId>{TEST-STYLE}</a:tableStyleId>
+              </a:tblPr>
+              <a:tblGrid>
+                <a:gridCol w="1828800"/>
+                <a:gridCol w="914400"/>
+              </a:tblGrid>
+              <a:tr h="304800">
+                <a:tc>
+                  <a:txBody>
+                    <a:bodyPr/>
+                    <a:p>
+                      <a:r>
+                        <a:rPr lang="en-US"/>
+                        <a:t>Run</a:t>
+                      </a:r>
+                    </a:p>
+                  </a:txBody>
+                  <a:tcPr/>
+                </a:tc>
+                <a:tc>
+                  <a:txBody>
+                    <a:bodyPr/>
+                    <a:p>
+                      <a:r>
+                        <a:rPr lang="en-US"/>
+                        <a:t>Gain</a:t>
+                      </a:r>
+                    </a:p>
+                  </a:txBody>
+                  <a:tcPr/>
+                </a:tc>
+              </a:tr>
+              <a:tr h="304800">
+                <a:tc>
+                  <a:txBody>
+                    <a:bodyPr/>
+                    <a:p>
+                      <a:r>
+                        <a:rPr lang="en-US"/>
+                        <a:t>A</a:t>
+                      </a:r>
+                    </a:p>
+                  </a:txBody>
+                  <a:tcPr/>
+                </a:tc>
+                <a:tc>
+                  <a:txBody>
+                    <a:bodyPr/>
+                    <a:p>
+                      <a:r>
+                        <a:rPr lang="en-US"/>
+                        <a:t>1.02</a:t>
+                      </a:r>
+                    </a:p>
+                  </a:txBody>
+                  <a:tcPr/>
+                </a:tc>
+              </a:tr>
+              <a:tr h="304800">
+                <a:tc>
+                  <a:txBody>
+                    <a:bodyPr/>
+                    <a:p>
+                      <a:r>
+                        <a:rPr lang="en-US"/>
+                        <a:t>B</a:t>
+                      </a:r>
+                    </a:p>
+                  </a:txBody>
+                  <a:tcPr/>
+                </a:tc>
+                <a:tc>
+                  <a:txBody>
+                    <a:bodyPr/>
+                    <a:p>
+                      <a:r>
+                        <a:rPr lang="en-US"/>
+                        <a:t>0.98</a:t>
+                      </a:r>
+                    </a:p>
+                  </a:txBody>
+                  <a:tcPr/>
+                </a:tc>
+              </a:tr>
+              <a:tr h="304800">
+                <a:tc>
+                  <a:txBody>
+                    <a:bodyPr/>
+                    <a:p>
+                      <a:r>
+                        <a:rPr lang="en-US"/>
+                        <a:t>C</a:t>
+                      </a:r>
+                    </a:p>
+                  </a:txBody>
+                  <a:tcPr/>
+                </a:tc>
+                <a:tc>
+                  <a:txBody>
+                    <a:bodyPr/>
+                    <a:p>
+                      <a:r>
+                        <a:rPr lang="en-US"/>
+                        <a:t>1.01</a:t>
+                      </a:r>
+                    </a:p>
+                  </a:txBody>
+                  <a:tcPr/>
+                </a:tc>
+              </a:tr>
+            </a:tbl>
+          </a:graphicData>
+        </a:graphic>
+      </p:graphicFrame>
       <p:graphicFrame>
         <p:nvGraphicFramePr>
           <p:cNvPr id="7" name="SmartArt"/>
